--- a/material/Data Analysis/01_데이터분석_개발환경설정.pptx
+++ b/material/Data Analysis/01_데이터분석_개발환경설정.pptx
@@ -1,6 +1,6 @@
 
 <file path=ppt/presentation.xml><?xml version="1.0" encoding="utf-8"?>
-<p:presentation xmlns:a="http://schemas.openxmlformats.org/drawingml/2006/main" xmlns:r="http://schemas.openxmlformats.org/officeDocument/2006/relationships" xmlns:p="http://schemas.openxmlformats.org/presentationml/2006/main" saveSubsetFonts="1">
+<p:presentation xmlns:a="http://schemas.openxmlformats.org/drawingml/2006/main" xmlns:r="http://schemas.openxmlformats.org/officeDocument/2006/relationships" xmlns:p="http://schemas.openxmlformats.org/presentationml/2006/main" embedTrueTypeFonts="1" saveSubsetFonts="1">
   <p:sldMasterIdLst>
     <p:sldMasterId id="2147483660" r:id="rId1"/>
   </p:sldMasterIdLst>
@@ -29,6 +29,34 @@
   </p:sldIdLst>
   <p:sldSz cx="12192000" cy="6858000"/>
   <p:notesSz cx="6858000" cy="9144000"/>
+  <p:embeddedFontLst>
+    <p:embeddedFont>
+      <p:font typeface="G마켓 산스 TTF Bold" panose="02000000000000000000" pitchFamily="2" charset="-127"/>
+      <p:bold r:id="rId21"/>
+    </p:embeddedFont>
+    <p:embeddedFont>
+      <p:font typeface="Pretendard Black" panose="02000A03000000020004" pitchFamily="2" charset="-127"/>
+      <p:bold r:id="rId22"/>
+    </p:embeddedFont>
+    <p:embeddedFont>
+      <p:font typeface="Pretendard Light" panose="02000403000000020004" pitchFamily="2" charset="-127"/>
+      <p:regular r:id="rId23"/>
+    </p:embeddedFont>
+    <p:embeddedFont>
+      <p:font typeface="Pretendard Medium" panose="02000603000000020004" pitchFamily="2" charset="-127"/>
+      <p:regular r:id="rId24"/>
+    </p:embeddedFont>
+    <p:embeddedFont>
+      <p:font typeface="맑은 고딕" panose="020B0503020000020004" pitchFamily="50" charset="-127"/>
+      <p:regular r:id="rId25"/>
+      <p:bold r:id="rId26"/>
+    </p:embeddedFont>
+    <p:embeddedFont>
+      <p:font typeface="메이플스토리" panose="02000300000000000000" pitchFamily="2" charset="-127"/>
+      <p:regular r:id="rId27"/>
+      <p:bold r:id="rId28"/>
+    </p:embeddedFont>
+  </p:embeddedFontLst>
   <p:defaultTextStyle>
     <a:defPPr>
       <a:defRPr lang="ko-KR"/>
@@ -235,7 +263,7 @@
             <a:fld id="{A13A867C-D490-40C2-AB8D-A60FA70A9BF5}" type="datetimeFigureOut">
               <a:rPr lang="ko-KR" altLang="en-US" smtClean="0"/>
               <a:pPr/>
-              <a:t>2025-07-30</a:t>
+              <a:t>2025-08-21</a:t>
             </a:fld>
             <a:endParaRPr lang="ko-KR" altLang="en-US" dirty="0"/>
           </a:p>
@@ -865,7 +893,7 @@
           <a:p>
             <a:fld id="{442BEE3F-2E9A-4FD8-8B8A-8619F3E161C0}" type="datetime1">
               <a:rPr lang="ko-KR" altLang="en-US" smtClean="0"/>
-              <a:t>2025-07-30</a:t>
+              <a:t>2025-08-21</a:t>
             </a:fld>
             <a:endParaRPr lang="ko-KR" altLang="en-US"/>
           </a:p>
@@ -1152,7 +1180,7 @@
           <a:p>
             <a:fld id="{0F78D9C4-20C1-4B15-A116-16DC77AD9A1E}" type="datetime1">
               <a:rPr lang="ko-KR" altLang="en-US" smtClean="0"/>
-              <a:t>2025-07-30</a:t>
+              <a:t>2025-08-21</a:t>
             </a:fld>
             <a:endParaRPr lang="ko-KR" altLang="en-US"/>
           </a:p>
@@ -1327,7 +1355,7 @@
           <a:p>
             <a:fld id="{7F5E23C3-0E3D-4E4E-8486-D7FB4C073DC1}" type="datetime1">
               <a:rPr lang="ko-KR" altLang="en-US" smtClean="0"/>
-              <a:t>2025-07-30</a:t>
+              <a:t>2025-08-21</a:t>
             </a:fld>
             <a:endParaRPr lang="ko-KR" altLang="en-US"/>
           </a:p>
@@ -1483,7 +1511,7 @@
           <a:p>
             <a:fld id="{9C6F2426-F011-4048-96E6-328581C59A1B}" type="datetimeFigureOut">
               <a:rPr lang="ko-KR" altLang="en-US" smtClean="0"/>
-              <a:t>2025-07-30</a:t>
+              <a:t>2025-08-21</a:t>
             </a:fld>
             <a:endParaRPr lang="ko-KR" altLang="en-US"/>
           </a:p>
@@ -1812,7 +1840,7 @@
           <a:p>
             <a:fld id="{7F5E23C3-0E3D-4E4E-8486-D7FB4C073DC1}" type="datetime1">
               <a:rPr lang="ko-KR" altLang="en-US" smtClean="0"/>
-              <a:t>2025-07-30</a:t>
+              <a:t>2025-08-21</a:t>
             </a:fld>
             <a:endParaRPr lang="ko-KR" altLang="en-US"/>
           </a:p>
